--- a/docs/CitationReviewerGuide.pptx
+++ b/docs/CitationReviewerGuide.pptx
@@ -121,6 +121,11 @@
       </a:defRPr>
     </a:lvl9pPr>
   </p:defaultTextStyle>
+  <p:extLst>
+    <p:ext uri="{EFAFB233-063F-42B5-8137-9DF3F51BA10A}">
+      <p15:sldGuideLst xmlns:p15="http://schemas.microsoft.com/office/powerpoint/2012/main"/>
+    </p:ext>
+  </p:extLst>
 </p:presentation>
 </file>
 
@@ -271,7 +276,7 @@
           <a:p>
             <a:fld id="{A570D5E4-9820-8A4C-880B-D00DFB29381F}" type="datetimeFigureOut">
               <a:rPr lang="en-GB" smtClean="0"/>
-              <a:t>29/04/2026</a:t>
+              <a:t>30/04/2026</a:t>
             </a:fld>
             <a:endParaRPr lang="en-GB"/>
           </a:p>
@@ -469,7 +474,7 @@
           <a:p>
             <a:fld id="{A570D5E4-9820-8A4C-880B-D00DFB29381F}" type="datetimeFigureOut">
               <a:rPr lang="en-GB" smtClean="0"/>
-              <a:t>29/04/2026</a:t>
+              <a:t>30/04/2026</a:t>
             </a:fld>
             <a:endParaRPr lang="en-GB"/>
           </a:p>
@@ -677,7 +682,7 @@
           <a:p>
             <a:fld id="{A570D5E4-9820-8A4C-880B-D00DFB29381F}" type="datetimeFigureOut">
               <a:rPr lang="en-GB" smtClean="0"/>
-              <a:t>29/04/2026</a:t>
+              <a:t>30/04/2026</a:t>
             </a:fld>
             <a:endParaRPr lang="en-GB"/>
           </a:p>
@@ -875,7 +880,7 @@
           <a:p>
             <a:fld id="{A570D5E4-9820-8A4C-880B-D00DFB29381F}" type="datetimeFigureOut">
               <a:rPr lang="en-GB" smtClean="0"/>
-              <a:t>29/04/2026</a:t>
+              <a:t>30/04/2026</a:t>
             </a:fld>
             <a:endParaRPr lang="en-GB"/>
           </a:p>
@@ -1150,7 +1155,7 @@
           <a:p>
             <a:fld id="{A570D5E4-9820-8A4C-880B-D00DFB29381F}" type="datetimeFigureOut">
               <a:rPr lang="en-GB" smtClean="0"/>
-              <a:t>29/04/2026</a:t>
+              <a:t>30/04/2026</a:t>
             </a:fld>
             <a:endParaRPr lang="en-GB"/>
           </a:p>
@@ -1415,7 +1420,7 @@
           <a:p>
             <a:fld id="{A570D5E4-9820-8A4C-880B-D00DFB29381F}" type="datetimeFigureOut">
               <a:rPr lang="en-GB" smtClean="0"/>
-              <a:t>29/04/2026</a:t>
+              <a:t>30/04/2026</a:t>
             </a:fld>
             <a:endParaRPr lang="en-GB"/>
           </a:p>
@@ -1827,7 +1832,7 @@
           <a:p>
             <a:fld id="{A570D5E4-9820-8A4C-880B-D00DFB29381F}" type="datetimeFigureOut">
               <a:rPr lang="en-GB" smtClean="0"/>
-              <a:t>29/04/2026</a:t>
+              <a:t>30/04/2026</a:t>
             </a:fld>
             <a:endParaRPr lang="en-GB"/>
           </a:p>
@@ -1968,7 +1973,7 @@
           <a:p>
             <a:fld id="{A570D5E4-9820-8A4C-880B-D00DFB29381F}" type="datetimeFigureOut">
               <a:rPr lang="en-GB" smtClean="0"/>
-              <a:t>29/04/2026</a:t>
+              <a:t>30/04/2026</a:t>
             </a:fld>
             <a:endParaRPr lang="en-GB"/>
           </a:p>
@@ -2081,7 +2086,7 @@
           <a:p>
             <a:fld id="{A570D5E4-9820-8A4C-880B-D00DFB29381F}" type="datetimeFigureOut">
               <a:rPr lang="en-GB" smtClean="0"/>
-              <a:t>29/04/2026</a:t>
+              <a:t>30/04/2026</a:t>
             </a:fld>
             <a:endParaRPr lang="en-GB"/>
           </a:p>
@@ -2392,7 +2397,7 @@
           <a:p>
             <a:fld id="{A570D5E4-9820-8A4C-880B-D00DFB29381F}" type="datetimeFigureOut">
               <a:rPr lang="en-GB" smtClean="0"/>
-              <a:t>29/04/2026</a:t>
+              <a:t>30/04/2026</a:t>
             </a:fld>
             <a:endParaRPr lang="en-GB"/>
           </a:p>
@@ -2680,7 +2685,7 @@
           <a:p>
             <a:fld id="{A570D5E4-9820-8A4C-880B-D00DFB29381F}" type="datetimeFigureOut">
               <a:rPr lang="en-GB" smtClean="0"/>
-              <a:t>29/04/2026</a:t>
+              <a:t>30/04/2026</a:t>
             </a:fld>
             <a:endParaRPr lang="en-GB"/>
           </a:p>
@@ -2921,7 +2926,7 @@
           <a:p>
             <a:fld id="{A570D5E4-9820-8A4C-880B-D00DFB29381F}" type="datetimeFigureOut">
               <a:rPr lang="en-GB" smtClean="0"/>
-              <a:t>29/04/2026</a:t>
+              <a:t>30/04/2026</a:t>
             </a:fld>
             <a:endParaRPr lang="en-GB"/>
           </a:p>
@@ -3390,6 +3395,59 @@
             <a:r>
               <a:rPr lang="en-GB" dirty="0"/>
               <a:t>Usage Guide for Reviewers</a:t>
+            </a:r>
+          </a:p>
+        </p:txBody>
+      </p:sp>
+      <p:sp>
+        <p:nvSpPr>
+          <p:cNvPr id="4" name="TextBox 3">
+            <a:extLst>
+              <a:ext uri="{FF2B5EF4-FFF2-40B4-BE49-F238E27FC236}">
+                <a16:creationId xmlns:a16="http://schemas.microsoft.com/office/drawing/2014/main" id="{3B29D905-8505-0E3A-BA52-87C4ECB24C59}"/>
+              </a:ext>
+            </a:extLst>
+          </p:cNvPr>
+          <p:cNvSpPr txBox="1"/>
+          <p:nvPr/>
+        </p:nvSpPr>
+        <p:spPr>
+          <a:xfrm>
+            <a:off x="251460" y="6240780"/>
+            <a:ext cx="11766363" cy="369332"/>
+          </a:xfrm>
+          <a:prstGeom prst="rect">
+            <a:avLst/>
+          </a:prstGeom>
+          <a:noFill/>
+        </p:spPr>
+        <p:txBody>
+          <a:bodyPr wrap="none" rtlCol="0">
+            <a:spAutoFit/>
+          </a:bodyPr>
+          <a:lstStyle/>
+          <a:p>
+            <a:r>
+              <a:rPr lang="en-GB" dirty="0"/>
+              <a:t>Daniel Westwood (</a:t>
+            </a:r>
+            <a:r>
+              <a:rPr lang="en-GB" dirty="0">
+                <a:hlinkClick r:id="rId2"/>
+              </a:rPr>
+              <a:t>daniel.westwood@stfc.ac.uk</a:t>
+            </a:r>
+            <a:r>
+              <a:rPr lang="en-GB" dirty="0"/>
+              <a:t>) 						30</a:t>
+            </a:r>
+            <a:r>
+              <a:rPr lang="en-GB" baseline="30000" dirty="0"/>
+              <a:t>th</a:t>
+            </a:r>
+            <a:r>
+              <a:rPr lang="en-GB" dirty="0"/>
+              <a:t> April 2026</a:t>
             </a:r>
           </a:p>
         </p:txBody>

--- a/docs/CitationReviewerGuide.pptx
+++ b/docs/CitationReviewerGuide.pptx
@@ -14,15 +14,16 @@
     <p:sldId id="265" r:id="rId8"/>
     <p:sldId id="267" r:id="rId9"/>
     <p:sldId id="268" r:id="rId10"/>
-    <p:sldId id="269" r:id="rId11"/>
-    <p:sldId id="270" r:id="rId12"/>
-    <p:sldId id="271" r:id="rId13"/>
-    <p:sldId id="272" r:id="rId14"/>
-    <p:sldId id="273" r:id="rId15"/>
-    <p:sldId id="263" r:id="rId16"/>
-    <p:sldId id="261" r:id="rId17"/>
-    <p:sldId id="262" r:id="rId18"/>
-    <p:sldId id="274" r:id="rId19"/>
+    <p:sldId id="275" r:id="rId11"/>
+    <p:sldId id="269" r:id="rId12"/>
+    <p:sldId id="270" r:id="rId13"/>
+    <p:sldId id="271" r:id="rId14"/>
+    <p:sldId id="272" r:id="rId15"/>
+    <p:sldId id="273" r:id="rId16"/>
+    <p:sldId id="263" r:id="rId17"/>
+    <p:sldId id="261" r:id="rId18"/>
+    <p:sldId id="262" r:id="rId19"/>
+    <p:sldId id="274" r:id="rId20"/>
   </p:sldIdLst>
   <p:sldSz cx="12192000" cy="6858000"/>
   <p:notesSz cx="6858000" cy="9144000"/>
@@ -276,7 +277,7 @@
           <a:p>
             <a:fld id="{A570D5E4-9820-8A4C-880B-D00DFB29381F}" type="datetimeFigureOut">
               <a:rPr lang="en-GB" smtClean="0"/>
-              <a:t>30/04/2026</a:t>
+              <a:t>17/08/2026</a:t>
             </a:fld>
             <a:endParaRPr lang="en-GB"/>
           </a:p>
@@ -474,7 +475,7 @@
           <a:p>
             <a:fld id="{A570D5E4-9820-8A4C-880B-D00DFB29381F}" type="datetimeFigureOut">
               <a:rPr lang="en-GB" smtClean="0"/>
-              <a:t>30/04/2026</a:t>
+              <a:t>17/08/2026</a:t>
             </a:fld>
             <a:endParaRPr lang="en-GB"/>
           </a:p>
@@ -682,7 +683,7 @@
           <a:p>
             <a:fld id="{A570D5E4-9820-8A4C-880B-D00DFB29381F}" type="datetimeFigureOut">
               <a:rPr lang="en-GB" smtClean="0"/>
-              <a:t>30/04/2026</a:t>
+              <a:t>17/08/2026</a:t>
             </a:fld>
             <a:endParaRPr lang="en-GB"/>
           </a:p>
@@ -880,7 +881,7 @@
           <a:p>
             <a:fld id="{A570D5E4-9820-8A4C-880B-D00DFB29381F}" type="datetimeFigureOut">
               <a:rPr lang="en-GB" smtClean="0"/>
-              <a:t>30/04/2026</a:t>
+              <a:t>17/08/2026</a:t>
             </a:fld>
             <a:endParaRPr lang="en-GB"/>
           </a:p>
@@ -1155,7 +1156,7 @@
           <a:p>
             <a:fld id="{A570D5E4-9820-8A4C-880B-D00DFB29381F}" type="datetimeFigureOut">
               <a:rPr lang="en-GB" smtClean="0"/>
-              <a:t>30/04/2026</a:t>
+              <a:t>17/08/2026</a:t>
             </a:fld>
             <a:endParaRPr lang="en-GB"/>
           </a:p>
@@ -1420,7 +1421,7 @@
           <a:p>
             <a:fld id="{A570D5E4-9820-8A4C-880B-D00DFB29381F}" type="datetimeFigureOut">
               <a:rPr lang="en-GB" smtClean="0"/>
-              <a:t>30/04/2026</a:t>
+              <a:t>17/08/2026</a:t>
             </a:fld>
             <a:endParaRPr lang="en-GB"/>
           </a:p>
@@ -1832,7 +1833,7 @@
           <a:p>
             <a:fld id="{A570D5E4-9820-8A4C-880B-D00DFB29381F}" type="datetimeFigureOut">
               <a:rPr lang="en-GB" smtClean="0"/>
-              <a:t>30/04/2026</a:t>
+              <a:t>17/08/2026</a:t>
             </a:fld>
             <a:endParaRPr lang="en-GB"/>
           </a:p>
@@ -1973,7 +1974,7 @@
           <a:p>
             <a:fld id="{A570D5E4-9820-8A4C-880B-D00DFB29381F}" type="datetimeFigureOut">
               <a:rPr lang="en-GB" smtClean="0"/>
-              <a:t>30/04/2026</a:t>
+              <a:t>17/08/2026</a:t>
             </a:fld>
             <a:endParaRPr lang="en-GB"/>
           </a:p>
@@ -2086,7 +2087,7 @@
           <a:p>
             <a:fld id="{A570D5E4-9820-8A4C-880B-D00DFB29381F}" type="datetimeFigureOut">
               <a:rPr lang="en-GB" smtClean="0"/>
-              <a:t>30/04/2026</a:t>
+              <a:t>17/08/2026</a:t>
             </a:fld>
             <a:endParaRPr lang="en-GB"/>
           </a:p>
@@ -2397,7 +2398,7 @@
           <a:p>
             <a:fld id="{A570D5E4-9820-8A4C-880B-D00DFB29381F}" type="datetimeFigureOut">
               <a:rPr lang="en-GB" smtClean="0"/>
-              <a:t>30/04/2026</a:t>
+              <a:t>17/08/2026</a:t>
             </a:fld>
             <a:endParaRPr lang="en-GB"/>
           </a:p>
@@ -2685,7 +2686,7 @@
           <a:p>
             <a:fld id="{A570D5E4-9820-8A4C-880B-D00DFB29381F}" type="datetimeFigureOut">
               <a:rPr lang="en-GB" smtClean="0"/>
-              <a:t>30/04/2026</a:t>
+              <a:t>17/08/2026</a:t>
             </a:fld>
             <a:endParaRPr lang="en-GB"/>
           </a:p>
@@ -2926,7 +2927,7 @@
           <a:p>
             <a:fld id="{A570D5E4-9820-8A4C-880B-D00DFB29381F}" type="datetimeFigureOut">
               <a:rPr lang="en-GB" smtClean="0"/>
-              <a:t>30/04/2026</a:t>
+              <a:t>17/08/2026</a:t>
             </a:fld>
             <a:endParaRPr lang="en-GB"/>
           </a:p>
@@ -3414,7 +3415,7 @@
         <p:spPr>
           <a:xfrm>
             <a:off x="251460" y="6240780"/>
-            <a:ext cx="11766363" cy="369332"/>
+            <a:ext cx="11492377" cy="369332"/>
           </a:xfrm>
           <a:prstGeom prst="rect">
             <a:avLst/>
@@ -3439,7 +3440,7 @@
             </a:r>
             <a:r>
               <a:rPr lang="en-GB" dirty="0"/>
-              <a:t>) 						30</a:t>
+              <a:t>) 				Last Updated 17</a:t>
             </a:r>
             <a:r>
               <a:rPr lang="en-GB" baseline="30000" dirty="0"/>
@@ -3447,7 +3448,7 @@
             </a:r>
             <a:r>
               <a:rPr lang="en-GB" dirty="0"/>
-              <a:t> April 2026</a:t>
+              <a:t> August 2026</a:t>
             </a:r>
           </a:p>
         </p:txBody>
@@ -3466,6 +3467,195 @@
 </file>
 
 <file path=ppt/slides/slide10.xml><?xml version="1.0" encoding="utf-8"?>
+<p:sld xmlns:a="http://schemas.openxmlformats.org/drawingml/2006/main" xmlns:r="http://schemas.openxmlformats.org/officeDocument/2006/relationships" xmlns:p="http://schemas.openxmlformats.org/presentationml/2006/main">
+  <p:cSld>
+    <p:spTree>
+      <p:nvGrpSpPr>
+        <p:cNvPr id="1" name="">
+          <a:extLst>
+            <a:ext uri="{FF2B5EF4-FFF2-40B4-BE49-F238E27FC236}">
+              <a16:creationId xmlns:a16="http://schemas.microsoft.com/office/drawing/2014/main" id="{732C780D-D719-B51F-8A59-8959F2B27CDA}"/>
+            </a:ext>
+          </a:extLst>
+        </p:cNvPr>
+        <p:cNvGrpSpPr/>
+        <p:nvPr/>
+      </p:nvGrpSpPr>
+      <p:grpSpPr>
+        <a:xfrm>
+          <a:off x="0" y="0"/>
+          <a:ext cx="0" cy="0"/>
+          <a:chOff x="0" y="0"/>
+          <a:chExt cx="0" cy="0"/>
+        </a:xfrm>
+      </p:grpSpPr>
+      <p:pic>
+        <p:nvPicPr>
+          <p:cNvPr id="7" name="Picture 6">
+            <a:extLst>
+              <a:ext uri="{FF2B5EF4-FFF2-40B4-BE49-F238E27FC236}">
+                <a16:creationId xmlns:a16="http://schemas.microsoft.com/office/drawing/2014/main" id="{BC7B4B8B-95A5-87D0-E84B-910687FD28BD}"/>
+              </a:ext>
+            </a:extLst>
+          </p:cNvPr>
+          <p:cNvPicPr>
+            <a:picLocks noChangeAspect="1"/>
+          </p:cNvPicPr>
+          <p:nvPr/>
+        </p:nvPicPr>
+        <p:blipFill>
+          <a:blip r:embed="rId2"/>
+          <a:stretch>
+            <a:fillRect/>
+          </a:stretch>
+        </p:blipFill>
+        <p:spPr>
+          <a:xfrm>
+            <a:off x="838200" y="877618"/>
+            <a:ext cx="9446558" cy="3667487"/>
+          </a:xfrm>
+          <a:prstGeom prst="rect">
+            <a:avLst/>
+          </a:prstGeom>
+        </p:spPr>
+      </p:pic>
+      <p:sp>
+        <p:nvSpPr>
+          <p:cNvPr id="2" name="Title 1">
+            <a:extLst>
+              <a:ext uri="{FF2B5EF4-FFF2-40B4-BE49-F238E27FC236}">
+                <a16:creationId xmlns:a16="http://schemas.microsoft.com/office/drawing/2014/main" id="{716E9064-B4D0-1BE5-1C6C-2ED50D1131EE}"/>
+              </a:ext>
+            </a:extLst>
+          </p:cNvPr>
+          <p:cNvSpPr>
+            <a:spLocks noGrp="1"/>
+          </p:cNvSpPr>
+          <p:nvPr>
+            <p:ph type="title"/>
+          </p:nvPr>
+        </p:nvSpPr>
+        <p:spPr>
+          <a:xfrm>
+            <a:off x="3348318" y="311336"/>
+            <a:ext cx="8234082" cy="1325563"/>
+          </a:xfrm>
+        </p:spPr>
+        <p:txBody>
+          <a:bodyPr/>
+          <a:lstStyle/>
+          <a:p>
+            <a:r>
+              <a:rPr lang="en-GB" dirty="0"/>
+              <a:t>Editing Citation Records (UI)</a:t>
+            </a:r>
+          </a:p>
+        </p:txBody>
+      </p:sp>
+      <p:sp>
+        <p:nvSpPr>
+          <p:cNvPr id="5" name="Content Placeholder 4">
+            <a:extLst>
+              <a:ext uri="{FF2B5EF4-FFF2-40B4-BE49-F238E27FC236}">
+                <a16:creationId xmlns:a16="http://schemas.microsoft.com/office/drawing/2014/main" id="{B6EED2DC-185D-D961-FC70-4B4B38183436}"/>
+              </a:ext>
+            </a:extLst>
+          </p:cNvPr>
+          <p:cNvSpPr>
+            <a:spLocks noGrp="1"/>
+          </p:cNvSpPr>
+          <p:nvPr>
+            <p:ph idx="1"/>
+          </p:nvPr>
+        </p:nvSpPr>
+        <p:spPr>
+          <a:xfrm>
+            <a:off x="838200" y="4545105"/>
+            <a:ext cx="10515600" cy="1631857"/>
+          </a:xfrm>
+        </p:spPr>
+        <p:txBody>
+          <a:bodyPr>
+            <a:normAutofit lnSpcReduction="10000"/>
+          </a:bodyPr>
+          <a:lstStyle/>
+          <a:p>
+            <a:r>
+              <a:rPr lang="en-GB" dirty="0"/>
+              <a:t>Any number of contacts may be added. If they are present in other records their information will be connected inside the service.</a:t>
+            </a:r>
+          </a:p>
+          <a:p>
+            <a:r>
+              <a:rPr lang="en-GB" dirty="0"/>
+              <a:t>One author must be selected as ‘Primary’, all other authors will be listed as Contacts</a:t>
+            </a:r>
+          </a:p>
+        </p:txBody>
+      </p:sp>
+      <p:sp>
+        <p:nvSpPr>
+          <p:cNvPr id="4" name="Rectangle 3">
+            <a:extLst>
+              <a:ext uri="{FF2B5EF4-FFF2-40B4-BE49-F238E27FC236}">
+                <a16:creationId xmlns:a16="http://schemas.microsoft.com/office/drawing/2014/main" id="{8BEBBAB4-555F-6EE7-46F0-8720F3D1EE42}"/>
+              </a:ext>
+            </a:extLst>
+          </p:cNvPr>
+          <p:cNvSpPr/>
+          <p:nvPr/>
+        </p:nvSpPr>
+        <p:spPr>
+          <a:xfrm>
+            <a:off x="8355330" y="2934923"/>
+            <a:ext cx="2663190" cy="1182614"/>
+          </a:xfrm>
+          <a:prstGeom prst="rect">
+            <a:avLst/>
+          </a:prstGeom>
+        </p:spPr>
+        <p:style>
+          <a:lnRef idx="2">
+            <a:schemeClr val="accent6">
+              <a:shade val="15000"/>
+            </a:schemeClr>
+          </a:lnRef>
+          <a:fillRef idx="1">
+            <a:schemeClr val="accent6"/>
+          </a:fillRef>
+          <a:effectRef idx="0">
+            <a:schemeClr val="accent6"/>
+          </a:effectRef>
+          <a:fontRef idx="minor">
+            <a:schemeClr val="lt1"/>
+          </a:fontRef>
+        </p:style>
+        <p:txBody>
+          <a:bodyPr rtlCol="0" anchor="ctr"/>
+          <a:lstStyle/>
+          <a:p>
+            <a:pPr algn="ctr"/>
+            <a:r>
+              <a:rPr lang="en-GB" dirty="0"/>
+              <a:t>Note: Contacts rows are now rearrangeable in the UI by drag-&amp;-drop! (17/08/2026)</a:t>
+            </a:r>
+          </a:p>
+        </p:txBody>
+      </p:sp>
+    </p:spTree>
+    <p:extLst>
+      <p:ext uri="{BB962C8B-B14F-4D97-AF65-F5344CB8AC3E}">
+        <p14:creationId xmlns:p14="http://schemas.microsoft.com/office/powerpoint/2010/main" val="2528125931"/>
+      </p:ext>
+    </p:extLst>
+  </p:cSld>
+  <p:clrMapOvr>
+    <a:masterClrMapping/>
+  </p:clrMapOvr>
+</p:sld>
+</file>
+
+<file path=ppt/slides/slide11.xml><?xml version="1.0" encoding="utf-8"?>
 <p:sld xmlns:a="http://schemas.openxmlformats.org/drawingml/2006/main" xmlns:r="http://schemas.openxmlformats.org/officeDocument/2006/relationships" xmlns:p="http://schemas.openxmlformats.org/presentationml/2006/main">
   <p:cSld>
     <p:spTree>
@@ -3605,7 +3795,7 @@
 </p:sld>
 </file>
 
-<file path=ppt/slides/slide11.xml><?xml version="1.0" encoding="utf-8"?>
+<file path=ppt/slides/slide12.xml><?xml version="1.0" encoding="utf-8"?>
 <p:sld xmlns:a="http://schemas.openxmlformats.org/drawingml/2006/main" xmlns:r="http://schemas.openxmlformats.org/officeDocument/2006/relationships" xmlns:p="http://schemas.openxmlformats.org/presentationml/2006/main">
   <p:cSld>
     <p:spTree>
@@ -3748,7 +3938,7 @@
 </p:sld>
 </file>
 
-<file path=ppt/slides/slide12.xml><?xml version="1.0" encoding="utf-8"?>
+<file path=ppt/slides/slide13.xml><?xml version="1.0" encoding="utf-8"?>
 <p:sld xmlns:a="http://schemas.openxmlformats.org/drawingml/2006/main" xmlns:r="http://schemas.openxmlformats.org/officeDocument/2006/relationships" xmlns:p="http://schemas.openxmlformats.org/presentationml/2006/main">
   <p:cSld>
     <p:spTree>
@@ -3882,7 +4072,7 @@
 </p:sld>
 </file>
 
-<file path=ppt/slides/slide13.xml><?xml version="1.0" encoding="utf-8"?>
+<file path=ppt/slides/slide14.xml><?xml version="1.0" encoding="utf-8"?>
 <p:sld xmlns:a="http://schemas.openxmlformats.org/drawingml/2006/main" xmlns:r="http://schemas.openxmlformats.org/officeDocument/2006/relationships" xmlns:p="http://schemas.openxmlformats.org/presentationml/2006/main">
   <p:cSld>
     <p:spTree>
@@ -4033,7 +4223,7 @@
 </p:sld>
 </file>
 
-<file path=ppt/slides/slide14.xml><?xml version="1.0" encoding="utf-8"?>
+<file path=ppt/slides/slide15.xml><?xml version="1.0" encoding="utf-8"?>
 <p:sld xmlns:a="http://schemas.openxmlformats.org/drawingml/2006/main" xmlns:r="http://schemas.openxmlformats.org/officeDocument/2006/relationships" xmlns:p="http://schemas.openxmlformats.org/presentationml/2006/main">
   <p:cSld>
     <p:spTree>
@@ -4274,7 +4464,7 @@
 </p:sld>
 </file>
 
-<file path=ppt/slides/slide15.xml><?xml version="1.0" encoding="utf-8"?>
+<file path=ppt/slides/slide16.xml><?xml version="1.0" encoding="utf-8"?>
 <p:sld xmlns:a="http://schemas.openxmlformats.org/drawingml/2006/main" xmlns:r="http://schemas.openxmlformats.org/officeDocument/2006/relationships" xmlns:p="http://schemas.openxmlformats.org/presentationml/2006/main">
   <p:cSld>
     <p:spTree>
@@ -4405,7 +4595,7 @@
 </p:sld>
 </file>
 
-<file path=ppt/slides/slide16.xml><?xml version="1.0" encoding="utf-8"?>
+<file path=ppt/slides/slide17.xml><?xml version="1.0" encoding="utf-8"?>
 <p:sld xmlns:a="http://schemas.openxmlformats.org/drawingml/2006/main" xmlns:r="http://schemas.openxmlformats.org/officeDocument/2006/relationships" xmlns:p="http://schemas.openxmlformats.org/presentationml/2006/main">
   <p:cSld>
     <p:spTree>
@@ -4630,7 +4820,7 @@
 </p:sld>
 </file>
 
-<file path=ppt/slides/slide17.xml><?xml version="1.0" encoding="utf-8"?>
+<file path=ppt/slides/slide18.xml><?xml version="1.0" encoding="utf-8"?>
 <p:sld xmlns:a="http://schemas.openxmlformats.org/drawingml/2006/main" xmlns:r="http://schemas.openxmlformats.org/officeDocument/2006/relationships" xmlns:p="http://schemas.openxmlformats.org/presentationml/2006/main">
   <p:cSld>
     <p:spTree>
@@ -4770,7 +4960,7 @@
 </p:sld>
 </file>
 
-<file path=ppt/slides/slide18.xml><?xml version="1.0" encoding="utf-8"?>
+<file path=ppt/slides/slide19.xml><?xml version="1.0" encoding="utf-8"?>
 <p:sld xmlns:a="http://schemas.openxmlformats.org/drawingml/2006/main" xmlns:r="http://schemas.openxmlformats.org/officeDocument/2006/relationships" xmlns:p="http://schemas.openxmlformats.org/presentationml/2006/main">
   <p:cSld>
     <p:spTree>

--- a/docs/CitationReviewerGuide.pptx
+++ b/docs/CitationReviewerGuide.pptx
@@ -17,13 +17,14 @@
     <p:sldId id="275" r:id="rId11"/>
     <p:sldId id="269" r:id="rId12"/>
     <p:sldId id="270" r:id="rId13"/>
-    <p:sldId id="271" r:id="rId14"/>
-    <p:sldId id="272" r:id="rId15"/>
-    <p:sldId id="273" r:id="rId16"/>
-    <p:sldId id="263" r:id="rId17"/>
-    <p:sldId id="261" r:id="rId18"/>
-    <p:sldId id="262" r:id="rId19"/>
-    <p:sldId id="274" r:id="rId20"/>
+    <p:sldId id="276" r:id="rId14"/>
+    <p:sldId id="271" r:id="rId15"/>
+    <p:sldId id="272" r:id="rId16"/>
+    <p:sldId id="273" r:id="rId17"/>
+    <p:sldId id="263" r:id="rId18"/>
+    <p:sldId id="261" r:id="rId19"/>
+    <p:sldId id="262" r:id="rId20"/>
+    <p:sldId id="274" r:id="rId21"/>
   </p:sldIdLst>
   <p:sldSz cx="12192000" cy="6858000"/>
   <p:notesSz cx="6858000" cy="9144000"/>
@@ -277,7 +278,7 @@
           <a:p>
             <a:fld id="{A570D5E4-9820-8A4C-880B-D00DFB29381F}" type="datetimeFigureOut">
               <a:rPr lang="en-GB" smtClean="0"/>
-              <a:t>17/08/2026</a:t>
+              <a:t>01/09/2026</a:t>
             </a:fld>
             <a:endParaRPr lang="en-GB"/>
           </a:p>
@@ -475,7 +476,7 @@
           <a:p>
             <a:fld id="{A570D5E4-9820-8A4C-880B-D00DFB29381F}" type="datetimeFigureOut">
               <a:rPr lang="en-GB" smtClean="0"/>
-              <a:t>17/08/2026</a:t>
+              <a:t>01/09/2026</a:t>
             </a:fld>
             <a:endParaRPr lang="en-GB"/>
           </a:p>
@@ -683,7 +684,7 @@
           <a:p>
             <a:fld id="{A570D5E4-9820-8A4C-880B-D00DFB29381F}" type="datetimeFigureOut">
               <a:rPr lang="en-GB" smtClean="0"/>
-              <a:t>17/08/2026</a:t>
+              <a:t>01/09/2026</a:t>
             </a:fld>
             <a:endParaRPr lang="en-GB"/>
           </a:p>
@@ -881,7 +882,7 @@
           <a:p>
             <a:fld id="{A570D5E4-9820-8A4C-880B-D00DFB29381F}" type="datetimeFigureOut">
               <a:rPr lang="en-GB" smtClean="0"/>
-              <a:t>17/08/2026</a:t>
+              <a:t>01/09/2026</a:t>
             </a:fld>
             <a:endParaRPr lang="en-GB"/>
           </a:p>
@@ -1156,7 +1157,7 @@
           <a:p>
             <a:fld id="{A570D5E4-9820-8A4C-880B-D00DFB29381F}" type="datetimeFigureOut">
               <a:rPr lang="en-GB" smtClean="0"/>
-              <a:t>17/08/2026</a:t>
+              <a:t>01/09/2026</a:t>
             </a:fld>
             <a:endParaRPr lang="en-GB"/>
           </a:p>
@@ -1421,7 +1422,7 @@
           <a:p>
             <a:fld id="{A570D5E4-9820-8A4C-880B-D00DFB29381F}" type="datetimeFigureOut">
               <a:rPr lang="en-GB" smtClean="0"/>
-              <a:t>17/08/2026</a:t>
+              <a:t>01/09/2026</a:t>
             </a:fld>
             <a:endParaRPr lang="en-GB"/>
           </a:p>
@@ -1833,7 +1834,7 @@
           <a:p>
             <a:fld id="{A570D5E4-9820-8A4C-880B-D00DFB29381F}" type="datetimeFigureOut">
               <a:rPr lang="en-GB" smtClean="0"/>
-              <a:t>17/08/2026</a:t>
+              <a:t>01/09/2026</a:t>
             </a:fld>
             <a:endParaRPr lang="en-GB"/>
           </a:p>
@@ -1974,7 +1975,7 @@
           <a:p>
             <a:fld id="{A570D5E4-9820-8A4C-880B-D00DFB29381F}" type="datetimeFigureOut">
               <a:rPr lang="en-GB" smtClean="0"/>
-              <a:t>17/08/2026</a:t>
+              <a:t>01/09/2026</a:t>
             </a:fld>
             <a:endParaRPr lang="en-GB"/>
           </a:p>
@@ -2087,7 +2088,7 @@
           <a:p>
             <a:fld id="{A570D5E4-9820-8A4C-880B-D00DFB29381F}" type="datetimeFigureOut">
               <a:rPr lang="en-GB" smtClean="0"/>
-              <a:t>17/08/2026</a:t>
+              <a:t>01/09/2026</a:t>
             </a:fld>
             <a:endParaRPr lang="en-GB"/>
           </a:p>
@@ -2398,7 +2399,7 @@
           <a:p>
             <a:fld id="{A570D5E4-9820-8A4C-880B-D00DFB29381F}" type="datetimeFigureOut">
               <a:rPr lang="en-GB" smtClean="0"/>
-              <a:t>17/08/2026</a:t>
+              <a:t>01/09/2026</a:t>
             </a:fld>
             <a:endParaRPr lang="en-GB"/>
           </a:p>
@@ -2686,7 +2687,7 @@
           <a:p>
             <a:fld id="{A570D5E4-9820-8A4C-880B-D00DFB29381F}" type="datetimeFigureOut">
               <a:rPr lang="en-GB" smtClean="0"/>
-              <a:t>17/08/2026</a:t>
+              <a:t>01/09/2026</a:t>
             </a:fld>
             <a:endParaRPr lang="en-GB"/>
           </a:p>
@@ -2927,7 +2928,7 @@
           <a:p>
             <a:fld id="{A570D5E4-9820-8A4C-880B-D00DFB29381F}" type="datetimeFigureOut">
               <a:rPr lang="en-GB" smtClean="0"/>
-              <a:t>17/08/2026</a:t>
+              <a:t>01/09/2026</a:t>
             </a:fld>
             <a:endParaRPr lang="en-GB"/>
           </a:p>
@@ -3415,7 +3416,7 @@
         <p:spPr>
           <a:xfrm>
             <a:off x="251460" y="6240780"/>
-            <a:ext cx="11492377" cy="369332"/>
+            <a:ext cx="11740137" cy="369332"/>
           </a:xfrm>
           <a:prstGeom prst="rect">
             <a:avLst/>
@@ -3440,15 +3441,15 @@
             </a:r>
             <a:r>
               <a:rPr lang="en-GB" dirty="0"/>
-              <a:t>) 				Last Updated 17</a:t>
+              <a:t>) 				Last Updated 1</a:t>
             </a:r>
             <a:r>
               <a:rPr lang="en-GB" baseline="30000" dirty="0"/>
-              <a:t>th</a:t>
-            </a:r>
-            <a:r>
-              <a:rPr lang="en-GB" dirty="0"/>
-              <a:t> August 2026</a:t>
+              <a:t>st</a:t>
+            </a:r>
+            <a:r>
+              <a:rPr lang="en-GB" dirty="0"/>
+              <a:t> September 2026</a:t>
             </a:r>
           </a:p>
         </p:txBody>
@@ -3946,6 +3947,140 @@
         <p:cNvPr id="1" name="">
           <a:extLst>
             <a:ext uri="{FF2B5EF4-FFF2-40B4-BE49-F238E27FC236}">
+              <a16:creationId xmlns:a16="http://schemas.microsoft.com/office/drawing/2014/main" id="{2E3664A5-61AB-F99B-4B0F-E6ACC2CC40B1}"/>
+            </a:ext>
+          </a:extLst>
+        </p:cNvPr>
+        <p:cNvGrpSpPr/>
+        <p:nvPr/>
+      </p:nvGrpSpPr>
+      <p:grpSpPr>
+        <a:xfrm>
+          <a:off x="0" y="0"/>
+          <a:ext cx="0" cy="0"/>
+          <a:chOff x="0" y="0"/>
+          <a:chExt cx="0" cy="0"/>
+        </a:xfrm>
+      </p:grpSpPr>
+      <p:sp>
+        <p:nvSpPr>
+          <p:cNvPr id="2" name="Title 1">
+            <a:extLst>
+              <a:ext uri="{FF2B5EF4-FFF2-40B4-BE49-F238E27FC236}">
+                <a16:creationId xmlns:a16="http://schemas.microsoft.com/office/drawing/2014/main" id="{03E5F2CC-E23E-018A-9314-3A7C86029906}"/>
+              </a:ext>
+            </a:extLst>
+          </p:cNvPr>
+          <p:cNvSpPr>
+            <a:spLocks noGrp="1"/>
+          </p:cNvSpPr>
+          <p:nvPr>
+            <p:ph type="title"/>
+          </p:nvPr>
+        </p:nvSpPr>
+        <p:spPr>
+          <a:xfrm>
+            <a:off x="3348318" y="311336"/>
+            <a:ext cx="8234082" cy="1325563"/>
+          </a:xfrm>
+        </p:spPr>
+        <p:txBody>
+          <a:bodyPr/>
+          <a:lstStyle/>
+          <a:p>
+            <a:r>
+              <a:rPr lang="en-GB" dirty="0"/>
+              <a:t>Editing Citation Records (UI)</a:t>
+            </a:r>
+          </a:p>
+        </p:txBody>
+      </p:sp>
+      <p:sp>
+        <p:nvSpPr>
+          <p:cNvPr id="5" name="Content Placeholder 4">
+            <a:extLst>
+              <a:ext uri="{FF2B5EF4-FFF2-40B4-BE49-F238E27FC236}">
+                <a16:creationId xmlns:a16="http://schemas.microsoft.com/office/drawing/2014/main" id="{53A134F4-CCC3-FEE6-6B78-DA4F9D4E6D64}"/>
+              </a:ext>
+            </a:extLst>
+          </p:cNvPr>
+          <p:cNvSpPr>
+            <a:spLocks noGrp="1"/>
+          </p:cNvSpPr>
+          <p:nvPr>
+            <p:ph idx="1"/>
+          </p:nvPr>
+        </p:nvSpPr>
+        <p:spPr>
+          <a:xfrm>
+            <a:off x="448235" y="4666129"/>
+            <a:ext cx="10134600" cy="1656229"/>
+          </a:xfrm>
+        </p:spPr>
+        <p:txBody>
+          <a:bodyPr>
+            <a:normAutofit/>
+          </a:bodyPr>
+          <a:lstStyle/>
+          <a:p>
+            <a:r>
+              <a:rPr lang="en-GB" dirty="0"/>
+              <a:t>To replicate all recorded information to other citation records, simply tick the box to `Replicate Info` and provide the Titles of other records to be replicated. This will also allow multiple DOIs to be minted for multiple records simultaneously.</a:t>
+            </a:r>
+          </a:p>
+        </p:txBody>
+      </p:sp>
+      <p:pic>
+        <p:nvPicPr>
+          <p:cNvPr id="3" name="Picture 2">
+            <a:extLst>
+              <a:ext uri="{FF2B5EF4-FFF2-40B4-BE49-F238E27FC236}">
+                <a16:creationId xmlns:a16="http://schemas.microsoft.com/office/drawing/2014/main" id="{15A50727-B5A6-C302-2A93-434310A826ED}"/>
+              </a:ext>
+            </a:extLst>
+          </p:cNvPr>
+          <p:cNvPicPr>
+            <a:picLocks noChangeAspect="1"/>
+          </p:cNvPicPr>
+          <p:nvPr/>
+        </p:nvPicPr>
+        <p:blipFill>
+          <a:blip r:embed="rId2"/>
+          <a:stretch>
+            <a:fillRect/>
+          </a:stretch>
+        </p:blipFill>
+        <p:spPr>
+          <a:xfrm>
+            <a:off x="609600" y="1283499"/>
+            <a:ext cx="8951259" cy="3194371"/>
+          </a:xfrm>
+          <a:prstGeom prst="rect">
+            <a:avLst/>
+          </a:prstGeom>
+        </p:spPr>
+      </p:pic>
+    </p:spTree>
+    <p:extLst>
+      <p:ext uri="{BB962C8B-B14F-4D97-AF65-F5344CB8AC3E}">
+        <p14:creationId xmlns:p14="http://schemas.microsoft.com/office/powerpoint/2010/main" val="2209300765"/>
+      </p:ext>
+    </p:extLst>
+  </p:cSld>
+  <p:clrMapOvr>
+    <a:masterClrMapping/>
+  </p:clrMapOvr>
+</p:sld>
+</file>
+
+<file path=ppt/slides/slide14.xml><?xml version="1.0" encoding="utf-8"?>
+<p:sld xmlns:a="http://schemas.openxmlformats.org/drawingml/2006/main" xmlns:r="http://schemas.openxmlformats.org/officeDocument/2006/relationships" xmlns:p="http://schemas.openxmlformats.org/presentationml/2006/main">
+  <p:cSld>
+    <p:spTree>
+      <p:nvGrpSpPr>
+        <p:cNvPr id="1" name="">
+          <a:extLst>
+            <a:ext uri="{FF2B5EF4-FFF2-40B4-BE49-F238E27FC236}">
               <a16:creationId xmlns:a16="http://schemas.microsoft.com/office/drawing/2014/main" id="{8E9CC629-62BA-E704-1572-FCB48C55C8C8}"/>
             </a:ext>
           </a:extLst>
@@ -4059,6 +4194,55 @@
           </a:prstGeom>
         </p:spPr>
       </p:pic>
+      <p:sp>
+        <p:nvSpPr>
+          <p:cNvPr id="4" name="Rectangle 3">
+            <a:extLst>
+              <a:ext uri="{FF2B5EF4-FFF2-40B4-BE49-F238E27FC236}">
+                <a16:creationId xmlns:a16="http://schemas.microsoft.com/office/drawing/2014/main" id="{7C1DDFDA-D220-6A47-6756-76A6CA2929CB}"/>
+              </a:ext>
+            </a:extLst>
+          </p:cNvPr>
+          <p:cNvSpPr/>
+          <p:nvPr/>
+        </p:nvSpPr>
+        <p:spPr>
+          <a:xfrm>
+            <a:off x="7947324" y="2100532"/>
+            <a:ext cx="3635076" cy="1979977"/>
+          </a:xfrm>
+          <a:prstGeom prst="rect">
+            <a:avLst/>
+          </a:prstGeom>
+        </p:spPr>
+        <p:style>
+          <a:lnRef idx="2">
+            <a:schemeClr val="accent6">
+              <a:shade val="15000"/>
+            </a:schemeClr>
+          </a:lnRef>
+          <a:fillRef idx="1">
+            <a:schemeClr val="accent6"/>
+          </a:fillRef>
+          <a:effectRef idx="0">
+            <a:schemeClr val="accent6"/>
+          </a:effectRef>
+          <a:fontRef idx="minor">
+            <a:schemeClr val="lt1"/>
+          </a:fontRef>
+        </p:style>
+        <p:txBody>
+          <a:bodyPr rtlCol="0" anchor="ctr"/>
+          <a:lstStyle/>
+          <a:p>
+            <a:pPr algn="ctr"/>
+            <a:r>
+              <a:rPr lang="en-GB" dirty="0"/>
+              <a:t>Note: Replication can now only be used to update existing records because the mandatory search facets are not replicated (01/09/2026)</a:t>
+            </a:r>
+          </a:p>
+        </p:txBody>
+      </p:sp>
     </p:spTree>
     <p:extLst>
       <p:ext uri="{BB962C8B-B14F-4D97-AF65-F5344CB8AC3E}">
@@ -4072,7 +4256,7 @@
 </p:sld>
 </file>
 
-<file path=ppt/slides/slide14.xml><?xml version="1.0" encoding="utf-8"?>
+<file path=ppt/slides/slide15.xml><?xml version="1.0" encoding="utf-8"?>
 <p:sld xmlns:a="http://schemas.openxmlformats.org/drawingml/2006/main" xmlns:r="http://schemas.openxmlformats.org/officeDocument/2006/relationships" xmlns:p="http://schemas.openxmlformats.org/presentationml/2006/main">
   <p:cSld>
     <p:spTree>
@@ -4095,97 +4279,12 @@
           <a:chExt cx="0" cy="0"/>
         </a:xfrm>
       </p:grpSpPr>
-      <p:sp>
-        <p:nvSpPr>
-          <p:cNvPr id="2" name="Title 1">
-            <a:extLst>
-              <a:ext uri="{FF2B5EF4-FFF2-40B4-BE49-F238E27FC236}">
-                <a16:creationId xmlns:a16="http://schemas.microsoft.com/office/drawing/2014/main" id="{CF60D6D9-8CEF-6507-EFA8-E7593A8EE2D4}"/>
-              </a:ext>
-            </a:extLst>
-          </p:cNvPr>
-          <p:cNvSpPr>
-            <a:spLocks noGrp="1"/>
-          </p:cNvSpPr>
-          <p:nvPr>
-            <p:ph type="title"/>
-          </p:nvPr>
-        </p:nvSpPr>
-        <p:spPr>
-          <a:xfrm>
-            <a:off x="3348318" y="311336"/>
-            <a:ext cx="8234082" cy="1325563"/>
-          </a:xfrm>
-        </p:spPr>
-        <p:txBody>
-          <a:bodyPr/>
-          <a:lstStyle/>
-          <a:p>
-            <a:r>
-              <a:rPr lang="en-GB" dirty="0"/>
-              <a:t>Minting DOIs (UI)</a:t>
-            </a:r>
-          </a:p>
-        </p:txBody>
-      </p:sp>
-      <p:sp>
-        <p:nvSpPr>
-          <p:cNvPr id="5" name="Content Placeholder 4">
-            <a:extLst>
-              <a:ext uri="{FF2B5EF4-FFF2-40B4-BE49-F238E27FC236}">
-                <a16:creationId xmlns:a16="http://schemas.microsoft.com/office/drawing/2014/main" id="{88141BC9-5117-FC63-812E-A386CDE949E0}"/>
-              </a:ext>
-            </a:extLst>
-          </p:cNvPr>
-          <p:cNvSpPr>
-            <a:spLocks noGrp="1"/>
-          </p:cNvSpPr>
-          <p:nvPr>
-            <p:ph idx="1"/>
-          </p:nvPr>
-        </p:nvSpPr>
-        <p:spPr>
-          <a:xfrm>
-            <a:off x="448235" y="1748119"/>
-            <a:ext cx="7713382" cy="4574240"/>
-          </a:xfrm>
-        </p:spPr>
-        <p:txBody>
-          <a:bodyPr>
-            <a:normAutofit/>
-          </a:bodyPr>
-          <a:lstStyle/>
-          <a:p>
-            <a:r>
-              <a:rPr lang="en-GB" dirty="0"/>
-              <a:t>If all information in the citation record is now accurate and ready for a DOI to be minted. Check the `Publish on Save` </a:t>
-            </a:r>
-            <a:r>
-              <a:rPr lang="en-GB" dirty="0" err="1"/>
-              <a:t>tickbox</a:t>
-            </a:r>
-            <a:r>
-              <a:rPr lang="en-GB" dirty="0"/>
-              <a:t> before pressing `Update version`.</a:t>
-            </a:r>
-          </a:p>
-          <a:p>
-            <a:endParaRPr lang="en-GB" dirty="0"/>
-          </a:p>
-          <a:p>
-            <a:r>
-              <a:rPr lang="en-GB" dirty="0"/>
-              <a:t>This will trigger the minting process. If successful, the citation record will present with `Published` next to the title, and a `Cite As` link will appear in the general information.</a:t>
-            </a:r>
-          </a:p>
-        </p:txBody>
-      </p:sp>
       <p:pic>
         <p:nvPicPr>
-          <p:cNvPr id="4" name="Picture 3">
-            <a:extLst>
-              <a:ext uri="{FF2B5EF4-FFF2-40B4-BE49-F238E27FC236}">
-                <a16:creationId xmlns:a16="http://schemas.microsoft.com/office/drawing/2014/main" id="{24C6F325-A985-4E91-1B5A-864F64CC925B}"/>
+          <p:cNvPr id="6" name="Picture 5">
+            <a:extLst>
+              <a:ext uri="{FF2B5EF4-FFF2-40B4-BE49-F238E27FC236}">
+                <a16:creationId xmlns:a16="http://schemas.microsoft.com/office/drawing/2014/main" id="{7A501601-D7B2-613F-0F5A-D27ED7C36D4D}"/>
               </a:ext>
             </a:extLst>
           </p:cNvPr>
@@ -4202,14 +4301,99 @@
         </p:blipFill>
         <p:spPr>
           <a:xfrm>
-            <a:off x="8161617" y="2375553"/>
-            <a:ext cx="3672433" cy="988732"/>
+            <a:off x="762692" y="1444331"/>
+            <a:ext cx="9533767" cy="1880759"/>
           </a:xfrm>
           <a:prstGeom prst="rect">
             <a:avLst/>
           </a:prstGeom>
         </p:spPr>
       </p:pic>
+      <p:sp>
+        <p:nvSpPr>
+          <p:cNvPr id="2" name="Title 1">
+            <a:extLst>
+              <a:ext uri="{FF2B5EF4-FFF2-40B4-BE49-F238E27FC236}">
+                <a16:creationId xmlns:a16="http://schemas.microsoft.com/office/drawing/2014/main" id="{CF60D6D9-8CEF-6507-EFA8-E7593A8EE2D4}"/>
+              </a:ext>
+            </a:extLst>
+          </p:cNvPr>
+          <p:cNvSpPr>
+            <a:spLocks noGrp="1"/>
+          </p:cNvSpPr>
+          <p:nvPr>
+            <p:ph type="title"/>
+          </p:nvPr>
+        </p:nvSpPr>
+        <p:spPr>
+          <a:xfrm>
+            <a:off x="3348318" y="311336"/>
+            <a:ext cx="8234082" cy="1325563"/>
+          </a:xfrm>
+        </p:spPr>
+        <p:txBody>
+          <a:bodyPr/>
+          <a:lstStyle/>
+          <a:p>
+            <a:r>
+              <a:rPr lang="en-GB" dirty="0"/>
+              <a:t>Minting DOIs (UI)</a:t>
+            </a:r>
+          </a:p>
+        </p:txBody>
+      </p:sp>
+      <p:sp>
+        <p:nvSpPr>
+          <p:cNvPr id="5" name="Content Placeholder 4">
+            <a:extLst>
+              <a:ext uri="{FF2B5EF4-FFF2-40B4-BE49-F238E27FC236}">
+                <a16:creationId xmlns:a16="http://schemas.microsoft.com/office/drawing/2014/main" id="{88141BC9-5117-FC63-812E-A386CDE949E0}"/>
+              </a:ext>
+            </a:extLst>
+          </p:cNvPr>
+          <p:cNvSpPr>
+            <a:spLocks noGrp="1"/>
+          </p:cNvSpPr>
+          <p:nvPr>
+            <p:ph idx="1"/>
+          </p:nvPr>
+        </p:nvSpPr>
+        <p:spPr>
+          <a:xfrm>
+            <a:off x="4091383" y="2886569"/>
+            <a:ext cx="7713382" cy="3901460"/>
+          </a:xfrm>
+        </p:spPr>
+        <p:txBody>
+          <a:bodyPr>
+            <a:normAutofit/>
+          </a:bodyPr>
+          <a:lstStyle/>
+          <a:p>
+            <a:r>
+              <a:rPr lang="en-GB" dirty="0"/>
+              <a:t>If all information in the citation record is now accurate and ready for a DOI to be minted. Check the `Publish on Save` </a:t>
+            </a:r>
+            <a:r>
+              <a:rPr lang="en-GB" dirty="0" err="1"/>
+              <a:t>tickbox</a:t>
+            </a:r>
+            <a:r>
+              <a:rPr lang="en-GB" dirty="0"/>
+              <a:t> before pressing `Update version`.</a:t>
+            </a:r>
+          </a:p>
+          <a:p>
+            <a:endParaRPr lang="en-GB" dirty="0"/>
+          </a:p>
+          <a:p>
+            <a:r>
+              <a:rPr lang="en-GB" dirty="0"/>
+              <a:t>This will trigger the minting process. If successful, the citation record will present with `Published` next to the title, and a `Cite As` link will appear in the general information.</a:t>
+            </a:r>
+          </a:p>
+        </p:txBody>
+      </p:sp>
     </p:spTree>
     <p:extLst>
       <p:ext uri="{BB962C8B-B14F-4D97-AF65-F5344CB8AC3E}">
@@ -4223,7 +4407,7 @@
 </p:sld>
 </file>
 
-<file path=ppt/slides/slide15.xml><?xml version="1.0" encoding="utf-8"?>
+<file path=ppt/slides/slide16.xml><?xml version="1.0" encoding="utf-8"?>
 <p:sld xmlns:a="http://schemas.openxmlformats.org/drawingml/2006/main" xmlns:r="http://schemas.openxmlformats.org/officeDocument/2006/relationships" xmlns:p="http://schemas.openxmlformats.org/presentationml/2006/main">
   <p:cSld>
     <p:spTree>
@@ -4319,10 +4503,10 @@
       </p:sp>
       <p:pic>
         <p:nvPicPr>
-          <p:cNvPr id="6" name="Picture 5">
-            <a:extLst>
-              <a:ext uri="{FF2B5EF4-FFF2-40B4-BE49-F238E27FC236}">
-                <a16:creationId xmlns:a16="http://schemas.microsoft.com/office/drawing/2014/main" id="{6CC94AE6-A4D5-CC33-1EE3-B229A86185CD}"/>
+          <p:cNvPr id="4" name="Picture 3">
+            <a:extLst>
+              <a:ext uri="{FF2B5EF4-FFF2-40B4-BE49-F238E27FC236}">
+                <a16:creationId xmlns:a16="http://schemas.microsoft.com/office/drawing/2014/main" id="{1BFA6B37-58DE-3002-633A-F36F582EF6BF}"/>
               </a:ext>
             </a:extLst>
           </p:cNvPr>
@@ -4333,14 +4517,45 @@
         </p:nvPicPr>
         <p:blipFill>
           <a:blip r:embed="rId2"/>
+          <a:srcRect r="15131"/>
           <a:stretch>
             <a:fillRect/>
           </a:stretch>
         </p:blipFill>
         <p:spPr>
           <a:xfrm>
-            <a:off x="1797423" y="2360365"/>
-            <a:ext cx="8597153" cy="4073214"/>
+            <a:off x="1142999" y="3151657"/>
+            <a:ext cx="9906001" cy="1385294"/>
+          </a:xfrm>
+          <a:prstGeom prst="rect">
+            <a:avLst/>
+          </a:prstGeom>
+        </p:spPr>
+      </p:pic>
+      <p:pic>
+        <p:nvPicPr>
+          <p:cNvPr id="10" name="Picture 9">
+            <a:extLst>
+              <a:ext uri="{FF2B5EF4-FFF2-40B4-BE49-F238E27FC236}">
+                <a16:creationId xmlns:a16="http://schemas.microsoft.com/office/drawing/2014/main" id="{EFCD14D7-E8B0-BE64-FFAD-F84ABCBE556E}"/>
+              </a:ext>
+            </a:extLst>
+          </p:cNvPr>
+          <p:cNvPicPr>
+            <a:picLocks noChangeAspect="1"/>
+          </p:cNvPicPr>
+          <p:nvPr/>
+        </p:nvPicPr>
+        <p:blipFill>
+          <a:blip r:embed="rId3"/>
+          <a:stretch>
+            <a:fillRect/>
+          </a:stretch>
+        </p:blipFill>
+        <p:spPr>
+          <a:xfrm>
+            <a:off x="1697652" y="2299362"/>
+            <a:ext cx="7772400" cy="452181"/>
           </a:xfrm>
           <a:prstGeom prst="rect">
             <a:avLst/>
@@ -4401,53 +4616,208 @@
       </p:sp>
       <p:sp>
         <p:nvSpPr>
-          <p:cNvPr id="8" name="Oval 7">
-            <a:extLst>
-              <a:ext uri="{FF2B5EF4-FFF2-40B4-BE49-F238E27FC236}">
-                <a16:creationId xmlns:a16="http://schemas.microsoft.com/office/drawing/2014/main" id="{FABB0274-73D1-F2C3-594D-F3D0F1F01A5E}"/>
-              </a:ext>
-            </a:extLst>
-          </p:cNvPr>
-          <p:cNvSpPr/>
+          <p:cNvPr id="11" name="Content Placeholder 4">
+            <a:extLst>
+              <a:ext uri="{FF2B5EF4-FFF2-40B4-BE49-F238E27FC236}">
+                <a16:creationId xmlns:a16="http://schemas.microsoft.com/office/drawing/2014/main" id="{E1775C80-A798-56FC-2547-14DB9465E994}"/>
+              </a:ext>
+            </a:extLst>
+          </p:cNvPr>
+          <p:cNvSpPr txBox="1">
+            <a:spLocks/>
+          </p:cNvSpPr>
           <p:nvPr/>
         </p:nvSpPr>
         <p:spPr>
           <a:xfrm>
-            <a:off x="1442157" y="4854388"/>
-            <a:ext cx="7567372" cy="793377"/>
-          </a:xfrm>
-          <a:prstGeom prst="ellipse">
+            <a:off x="914400" y="4937065"/>
+            <a:ext cx="10134600" cy="1656229"/>
+          </a:xfrm>
+          <a:prstGeom prst="rect">
             <a:avLst/>
           </a:prstGeom>
-          <a:noFill/>
-          <a:ln>
-            <a:solidFill>
-              <a:srgbClr val="FF0000"/>
-            </a:solidFill>
-          </a:ln>
-        </p:spPr>
-        <p:style>
-          <a:lnRef idx="2">
-            <a:schemeClr val="accent1">
-              <a:shade val="15000"/>
-            </a:schemeClr>
-          </a:lnRef>
-          <a:fillRef idx="1">
-            <a:schemeClr val="accent1"/>
-          </a:fillRef>
-          <a:effectRef idx="0">
-            <a:schemeClr val="accent1"/>
-          </a:effectRef>
-          <a:fontRef idx="minor">
-            <a:schemeClr val="lt1"/>
-          </a:fontRef>
-        </p:style>
-        <p:txBody>
-          <a:bodyPr rtlCol="0" anchor="ctr"/>
-          <a:lstStyle/>
-          <a:p>
-            <a:pPr algn="ctr"/>
-            <a:endParaRPr lang="en-GB"/>
+        </p:spPr>
+        <p:txBody>
+          <a:bodyPr vert="horz" lIns="91440" tIns="45720" rIns="91440" bIns="45720" rtlCol="0">
+            <a:normAutofit/>
+          </a:bodyPr>
+          <a:lstStyle>
+            <a:lvl1pPr marL="228600" indent="-228600" algn="l" defTabSz="914400" rtl="0" eaLnBrk="1" latinLnBrk="0" hangingPunct="1">
+              <a:lnSpc>
+                <a:spcPct val="90000"/>
+              </a:lnSpc>
+              <a:spcBef>
+                <a:spcPts val="1000"/>
+              </a:spcBef>
+              <a:buFont typeface="Arial" panose="020B0604020202020204" pitchFamily="34" charset="0"/>
+              <a:buChar char="•"/>
+              <a:defRPr sz="2800" kern="1200">
+                <a:solidFill>
+                  <a:schemeClr val="tx1"/>
+                </a:solidFill>
+                <a:latin typeface="+mn-lt"/>
+                <a:ea typeface="+mn-ea"/>
+                <a:cs typeface="+mn-cs"/>
+              </a:defRPr>
+            </a:lvl1pPr>
+            <a:lvl2pPr marL="685800" indent="-228600" algn="l" defTabSz="914400" rtl="0" eaLnBrk="1" latinLnBrk="0" hangingPunct="1">
+              <a:lnSpc>
+                <a:spcPct val="90000"/>
+              </a:lnSpc>
+              <a:spcBef>
+                <a:spcPts val="500"/>
+              </a:spcBef>
+              <a:buFont typeface="Arial" panose="020B0604020202020204" pitchFamily="34" charset="0"/>
+              <a:buChar char="•"/>
+              <a:defRPr sz="2400" kern="1200">
+                <a:solidFill>
+                  <a:schemeClr val="tx1"/>
+                </a:solidFill>
+                <a:latin typeface="+mn-lt"/>
+                <a:ea typeface="+mn-ea"/>
+                <a:cs typeface="+mn-cs"/>
+              </a:defRPr>
+            </a:lvl2pPr>
+            <a:lvl3pPr marL="1143000" indent="-228600" algn="l" defTabSz="914400" rtl="0" eaLnBrk="1" latinLnBrk="0" hangingPunct="1">
+              <a:lnSpc>
+                <a:spcPct val="90000"/>
+              </a:lnSpc>
+              <a:spcBef>
+                <a:spcPts val="500"/>
+              </a:spcBef>
+              <a:buFont typeface="Arial" panose="020B0604020202020204" pitchFamily="34" charset="0"/>
+              <a:buChar char="•"/>
+              <a:defRPr sz="2000" kern="1200">
+                <a:solidFill>
+                  <a:schemeClr val="tx1"/>
+                </a:solidFill>
+                <a:latin typeface="+mn-lt"/>
+                <a:ea typeface="+mn-ea"/>
+                <a:cs typeface="+mn-cs"/>
+              </a:defRPr>
+            </a:lvl3pPr>
+            <a:lvl4pPr marL="1600200" indent="-228600" algn="l" defTabSz="914400" rtl="0" eaLnBrk="1" latinLnBrk="0" hangingPunct="1">
+              <a:lnSpc>
+                <a:spcPct val="90000"/>
+              </a:lnSpc>
+              <a:spcBef>
+                <a:spcPts val="500"/>
+              </a:spcBef>
+              <a:buFont typeface="Arial" panose="020B0604020202020204" pitchFamily="34" charset="0"/>
+              <a:buChar char="•"/>
+              <a:defRPr sz="1800" kern="1200">
+                <a:solidFill>
+                  <a:schemeClr val="tx1"/>
+                </a:solidFill>
+                <a:latin typeface="+mn-lt"/>
+                <a:ea typeface="+mn-ea"/>
+                <a:cs typeface="+mn-cs"/>
+              </a:defRPr>
+            </a:lvl4pPr>
+            <a:lvl5pPr marL="2057400" indent="-228600" algn="l" defTabSz="914400" rtl="0" eaLnBrk="1" latinLnBrk="0" hangingPunct="1">
+              <a:lnSpc>
+                <a:spcPct val="90000"/>
+              </a:lnSpc>
+              <a:spcBef>
+                <a:spcPts val="500"/>
+              </a:spcBef>
+              <a:buFont typeface="Arial" panose="020B0604020202020204" pitchFamily="34" charset="0"/>
+              <a:buChar char="•"/>
+              <a:defRPr sz="1800" kern="1200">
+                <a:solidFill>
+                  <a:schemeClr val="tx1"/>
+                </a:solidFill>
+                <a:latin typeface="+mn-lt"/>
+                <a:ea typeface="+mn-ea"/>
+                <a:cs typeface="+mn-cs"/>
+              </a:defRPr>
+            </a:lvl5pPr>
+            <a:lvl6pPr marL="2514600" indent="-228600" algn="l" defTabSz="914400" rtl="0" eaLnBrk="1" latinLnBrk="0" hangingPunct="1">
+              <a:lnSpc>
+                <a:spcPct val="90000"/>
+              </a:lnSpc>
+              <a:spcBef>
+                <a:spcPts val="500"/>
+              </a:spcBef>
+              <a:buFont typeface="Arial" panose="020B0604020202020204" pitchFamily="34" charset="0"/>
+              <a:buChar char="•"/>
+              <a:defRPr sz="1800" kern="1200">
+                <a:solidFill>
+                  <a:schemeClr val="tx1"/>
+                </a:solidFill>
+                <a:latin typeface="+mn-lt"/>
+                <a:ea typeface="+mn-ea"/>
+                <a:cs typeface="+mn-cs"/>
+              </a:defRPr>
+            </a:lvl6pPr>
+            <a:lvl7pPr marL="2971800" indent="-228600" algn="l" defTabSz="914400" rtl="0" eaLnBrk="1" latinLnBrk="0" hangingPunct="1">
+              <a:lnSpc>
+                <a:spcPct val="90000"/>
+              </a:lnSpc>
+              <a:spcBef>
+                <a:spcPts val="500"/>
+              </a:spcBef>
+              <a:buFont typeface="Arial" panose="020B0604020202020204" pitchFamily="34" charset="0"/>
+              <a:buChar char="•"/>
+              <a:defRPr sz="1800" kern="1200">
+                <a:solidFill>
+                  <a:schemeClr val="tx1"/>
+                </a:solidFill>
+                <a:latin typeface="+mn-lt"/>
+                <a:ea typeface="+mn-ea"/>
+                <a:cs typeface="+mn-cs"/>
+              </a:defRPr>
+            </a:lvl7pPr>
+            <a:lvl8pPr marL="3429000" indent="-228600" algn="l" defTabSz="914400" rtl="0" eaLnBrk="1" latinLnBrk="0" hangingPunct="1">
+              <a:lnSpc>
+                <a:spcPct val="90000"/>
+              </a:lnSpc>
+              <a:spcBef>
+                <a:spcPts val="500"/>
+              </a:spcBef>
+              <a:buFont typeface="Arial" panose="020B0604020202020204" pitchFamily="34" charset="0"/>
+              <a:buChar char="•"/>
+              <a:defRPr sz="1800" kern="1200">
+                <a:solidFill>
+                  <a:schemeClr val="tx1"/>
+                </a:solidFill>
+                <a:latin typeface="+mn-lt"/>
+                <a:ea typeface="+mn-ea"/>
+                <a:cs typeface="+mn-cs"/>
+              </a:defRPr>
+            </a:lvl8pPr>
+            <a:lvl9pPr marL="3886200" indent="-228600" algn="l" defTabSz="914400" rtl="0" eaLnBrk="1" latinLnBrk="0" hangingPunct="1">
+              <a:lnSpc>
+                <a:spcPct val="90000"/>
+              </a:lnSpc>
+              <a:spcBef>
+                <a:spcPts val="500"/>
+              </a:spcBef>
+              <a:buFont typeface="Arial" panose="020B0604020202020204" pitchFamily="34" charset="0"/>
+              <a:buChar char="•"/>
+              <a:defRPr sz="1800" kern="1200">
+                <a:solidFill>
+                  <a:schemeClr val="tx1"/>
+                </a:solidFill>
+                <a:latin typeface="+mn-lt"/>
+                <a:ea typeface="+mn-ea"/>
+                <a:cs typeface="+mn-cs"/>
+              </a:defRPr>
+            </a:lvl9pPr>
+          </a:lstStyle>
+          <a:p>
+            <a:r>
+              <a:rPr lang="en-GB" dirty="0"/>
+              <a:t>Click the </a:t>
+            </a:r>
+            <a:r>
+              <a:rPr lang="en-GB" dirty="0" err="1"/>
+              <a:t>BibTeX</a:t>
+            </a:r>
+            <a:r>
+              <a:rPr lang="en-GB" dirty="0"/>
+              <a:t> or RIS buttons to get a download of the referencing information in the respective formats. Report any issues to the CEDA Helpdesk</a:t>
+            </a:r>
           </a:p>
         </p:txBody>
       </p:sp>
@@ -4464,7 +4834,7 @@
 </p:sld>
 </file>
 
-<file path=ppt/slides/slide16.xml><?xml version="1.0" encoding="utf-8"?>
+<file path=ppt/slides/slide17.xml><?xml version="1.0" encoding="utf-8"?>
 <p:sld xmlns:a="http://schemas.openxmlformats.org/drawingml/2006/main" xmlns:r="http://schemas.openxmlformats.org/officeDocument/2006/relationships" xmlns:p="http://schemas.openxmlformats.org/presentationml/2006/main">
   <p:cSld>
     <p:spTree>
@@ -4595,7 +4965,7 @@
 </p:sld>
 </file>
 
-<file path=ppt/slides/slide17.xml><?xml version="1.0" encoding="utf-8"?>
+<file path=ppt/slides/slide18.xml><?xml version="1.0" encoding="utf-8"?>
 <p:sld xmlns:a="http://schemas.openxmlformats.org/drawingml/2006/main" xmlns:r="http://schemas.openxmlformats.org/officeDocument/2006/relationships" xmlns:p="http://schemas.openxmlformats.org/presentationml/2006/main">
   <p:cSld>
     <p:spTree>
@@ -4663,11 +5033,8 @@
           <a:p>
             <a:r>
               <a:rPr lang="en-GB" dirty="0"/>
-              <a:t>You must request an API project token to use the API services to upload content to the citation service. </a:t>
-            </a:r>
-          </a:p>
-          <a:p>
-            <a:endParaRPr lang="en-GB" dirty="0"/>
+              <a:t>You must request an API project token to use the API services to upload content to the citation service. Contact the CEDA Helpdesk to arrange this.</a:t>
+            </a:r>
           </a:p>
           <a:p>
             <a:r>
@@ -4820,7 +5187,7 @@
 </p:sld>
 </file>
 
-<file path=ppt/slides/slide18.xml><?xml version="1.0" encoding="utf-8"?>
+<file path=ppt/slides/slide19.xml><?xml version="1.0" encoding="utf-8"?>
 <p:sld xmlns:a="http://schemas.openxmlformats.org/drawingml/2006/main" xmlns:r="http://schemas.openxmlformats.org/officeDocument/2006/relationships" xmlns:p="http://schemas.openxmlformats.org/presentationml/2006/main">
   <p:cSld>
     <p:spTree>
@@ -4951,167 +5318,6 @@
     <p:extLst>
       <p:ext uri="{BB962C8B-B14F-4D97-AF65-F5344CB8AC3E}">
         <p14:creationId xmlns:p14="http://schemas.microsoft.com/office/powerpoint/2010/main" val="766721521"/>
-      </p:ext>
-    </p:extLst>
-  </p:cSld>
-  <p:clrMapOvr>
-    <a:masterClrMapping/>
-  </p:clrMapOvr>
-</p:sld>
-</file>
-
-<file path=ppt/slides/slide19.xml><?xml version="1.0" encoding="utf-8"?>
-<p:sld xmlns:a="http://schemas.openxmlformats.org/drawingml/2006/main" xmlns:r="http://schemas.openxmlformats.org/officeDocument/2006/relationships" xmlns:p="http://schemas.openxmlformats.org/presentationml/2006/main">
-  <p:cSld>
-    <p:spTree>
-      <p:nvGrpSpPr>
-        <p:cNvPr id="1" name="">
-          <a:extLst>
-            <a:ext uri="{FF2B5EF4-FFF2-40B4-BE49-F238E27FC236}">
-              <a16:creationId xmlns:a16="http://schemas.microsoft.com/office/drawing/2014/main" id="{D146C2CE-2094-97A0-E4CC-1340AAE4A933}"/>
-            </a:ext>
-          </a:extLst>
-        </p:cNvPr>
-        <p:cNvGrpSpPr/>
-        <p:nvPr/>
-      </p:nvGrpSpPr>
-      <p:grpSpPr>
-        <a:xfrm>
-          <a:off x="0" y="0"/>
-          <a:ext cx="0" cy="0"/>
-          <a:chOff x="0" y="0"/>
-          <a:chExt cx="0" cy="0"/>
-        </a:xfrm>
-      </p:grpSpPr>
-      <p:sp>
-        <p:nvSpPr>
-          <p:cNvPr id="2" name="Title 1">
-            <a:extLst>
-              <a:ext uri="{FF2B5EF4-FFF2-40B4-BE49-F238E27FC236}">
-                <a16:creationId xmlns:a16="http://schemas.microsoft.com/office/drawing/2014/main" id="{A0EBC485-AA40-2C31-0F80-0C584E1E7184}"/>
-              </a:ext>
-            </a:extLst>
-          </p:cNvPr>
-          <p:cNvSpPr>
-            <a:spLocks noGrp="1"/>
-          </p:cNvSpPr>
-          <p:nvPr>
-            <p:ph type="title"/>
-          </p:nvPr>
-        </p:nvSpPr>
-        <p:spPr/>
-        <p:txBody>
-          <a:bodyPr/>
-          <a:lstStyle/>
-          <a:p>
-            <a:r>
-              <a:rPr lang="en-GB" dirty="0"/>
-              <a:t>Minting DOIs (API)</a:t>
-            </a:r>
-          </a:p>
-        </p:txBody>
-      </p:sp>
-      <p:sp>
-        <p:nvSpPr>
-          <p:cNvPr id="3" name="Content Placeholder 2">
-            <a:extLst>
-              <a:ext uri="{FF2B5EF4-FFF2-40B4-BE49-F238E27FC236}">
-                <a16:creationId xmlns:a16="http://schemas.microsoft.com/office/drawing/2014/main" id="{2804DF23-3491-3DB4-D704-3ABFA0FD1AA1}"/>
-              </a:ext>
-            </a:extLst>
-          </p:cNvPr>
-          <p:cNvSpPr>
-            <a:spLocks noGrp="1"/>
-          </p:cNvSpPr>
-          <p:nvPr>
-            <p:ph idx="1"/>
-          </p:nvPr>
-        </p:nvSpPr>
-        <p:spPr/>
-        <p:txBody>
-          <a:bodyPr/>
-          <a:lstStyle/>
-          <a:p>
-            <a:pPr marL="0" indent="0">
-              <a:buNone/>
-            </a:pPr>
-            <a:r>
-              <a:rPr lang="en-GB" dirty="0"/>
-              <a:t>To mint a DOI on creating/updating a record via the API, simply add the field `</a:t>
-            </a:r>
-            <a:r>
-              <a:rPr lang="en-GB" dirty="0" err="1"/>
-              <a:t>publish_on_save</a:t>
-            </a:r>
-            <a:r>
-              <a:rPr lang="en-GB" dirty="0"/>
-              <a:t>: True` to your JSON content to be uploaded. Review the </a:t>
-            </a:r>
-            <a:r>
-              <a:rPr lang="en-GB" dirty="0" err="1"/>
-              <a:t>response.content</a:t>
-            </a:r>
-            <a:r>
-              <a:rPr lang="en-GB" dirty="0"/>
-              <a:t> object to verify if DOI minting was successful – specifically check for any `warnings` in the response JSON.</a:t>
-            </a:r>
-          </a:p>
-          <a:p>
-            <a:pPr marL="0" indent="0">
-              <a:buNone/>
-            </a:pPr>
-            <a:endParaRPr lang="en-GB" dirty="0"/>
-          </a:p>
-          <a:p>
-            <a:pPr marL="0" indent="0">
-              <a:buNone/>
-            </a:pPr>
-            <a:r>
-              <a:rPr lang="en-GB" dirty="0"/>
-              <a:t>If a problem occurs please contact </a:t>
-            </a:r>
-            <a:r>
-              <a:rPr lang="en-GB" dirty="0" err="1"/>
-              <a:t>support@ceda.ac.uk</a:t>
-            </a:r>
-            <a:endParaRPr lang="en-GB" dirty="0"/>
-          </a:p>
-        </p:txBody>
-      </p:sp>
-      <p:pic>
-        <p:nvPicPr>
-          <p:cNvPr id="5" name="Picture 4">
-            <a:extLst>
-              <a:ext uri="{FF2B5EF4-FFF2-40B4-BE49-F238E27FC236}">
-                <a16:creationId xmlns:a16="http://schemas.microsoft.com/office/drawing/2014/main" id="{02692E62-E916-4B6A-B16F-3E5E89E27AFF}"/>
-              </a:ext>
-            </a:extLst>
-          </p:cNvPr>
-          <p:cNvPicPr>
-            <a:picLocks noChangeAspect="1"/>
-          </p:cNvPicPr>
-          <p:nvPr/>
-        </p:nvPicPr>
-        <p:blipFill>
-          <a:blip r:embed="rId2"/>
-          <a:stretch>
-            <a:fillRect/>
-          </a:stretch>
-        </p:blipFill>
-        <p:spPr>
-          <a:xfrm>
-            <a:off x="1240490" y="5011774"/>
-            <a:ext cx="9284552" cy="1567013"/>
-          </a:xfrm>
-          <a:prstGeom prst="rect">
-            <a:avLst/>
-          </a:prstGeom>
-        </p:spPr>
-      </p:pic>
-    </p:spTree>
-    <p:extLst>
-      <p:ext uri="{BB962C8B-B14F-4D97-AF65-F5344CB8AC3E}">
-        <p14:creationId xmlns:p14="http://schemas.microsoft.com/office/powerpoint/2010/main" val="1424265330"/>
       </p:ext>
     </p:extLst>
   </p:cSld>
@@ -5222,6 +5428,167 @@
     <p:extLst>
       <p:ext uri="{BB962C8B-B14F-4D97-AF65-F5344CB8AC3E}">
         <p14:creationId xmlns:p14="http://schemas.microsoft.com/office/powerpoint/2010/main" val="1198418198"/>
+      </p:ext>
+    </p:extLst>
+  </p:cSld>
+  <p:clrMapOvr>
+    <a:masterClrMapping/>
+  </p:clrMapOvr>
+</p:sld>
+</file>
+
+<file path=ppt/slides/slide20.xml><?xml version="1.0" encoding="utf-8"?>
+<p:sld xmlns:a="http://schemas.openxmlformats.org/drawingml/2006/main" xmlns:r="http://schemas.openxmlformats.org/officeDocument/2006/relationships" xmlns:p="http://schemas.openxmlformats.org/presentationml/2006/main">
+  <p:cSld>
+    <p:spTree>
+      <p:nvGrpSpPr>
+        <p:cNvPr id="1" name="">
+          <a:extLst>
+            <a:ext uri="{FF2B5EF4-FFF2-40B4-BE49-F238E27FC236}">
+              <a16:creationId xmlns:a16="http://schemas.microsoft.com/office/drawing/2014/main" id="{D146C2CE-2094-97A0-E4CC-1340AAE4A933}"/>
+            </a:ext>
+          </a:extLst>
+        </p:cNvPr>
+        <p:cNvGrpSpPr/>
+        <p:nvPr/>
+      </p:nvGrpSpPr>
+      <p:grpSpPr>
+        <a:xfrm>
+          <a:off x="0" y="0"/>
+          <a:ext cx="0" cy="0"/>
+          <a:chOff x="0" y="0"/>
+          <a:chExt cx="0" cy="0"/>
+        </a:xfrm>
+      </p:grpSpPr>
+      <p:sp>
+        <p:nvSpPr>
+          <p:cNvPr id="2" name="Title 1">
+            <a:extLst>
+              <a:ext uri="{FF2B5EF4-FFF2-40B4-BE49-F238E27FC236}">
+                <a16:creationId xmlns:a16="http://schemas.microsoft.com/office/drawing/2014/main" id="{A0EBC485-AA40-2C31-0F80-0C584E1E7184}"/>
+              </a:ext>
+            </a:extLst>
+          </p:cNvPr>
+          <p:cNvSpPr>
+            <a:spLocks noGrp="1"/>
+          </p:cNvSpPr>
+          <p:nvPr>
+            <p:ph type="title"/>
+          </p:nvPr>
+        </p:nvSpPr>
+        <p:spPr/>
+        <p:txBody>
+          <a:bodyPr/>
+          <a:lstStyle/>
+          <a:p>
+            <a:r>
+              <a:rPr lang="en-GB" dirty="0"/>
+              <a:t>Minting DOIs (API)</a:t>
+            </a:r>
+          </a:p>
+        </p:txBody>
+      </p:sp>
+      <p:sp>
+        <p:nvSpPr>
+          <p:cNvPr id="3" name="Content Placeholder 2">
+            <a:extLst>
+              <a:ext uri="{FF2B5EF4-FFF2-40B4-BE49-F238E27FC236}">
+                <a16:creationId xmlns:a16="http://schemas.microsoft.com/office/drawing/2014/main" id="{2804DF23-3491-3DB4-D704-3ABFA0FD1AA1}"/>
+              </a:ext>
+            </a:extLst>
+          </p:cNvPr>
+          <p:cNvSpPr>
+            <a:spLocks noGrp="1"/>
+          </p:cNvSpPr>
+          <p:nvPr>
+            <p:ph idx="1"/>
+          </p:nvPr>
+        </p:nvSpPr>
+        <p:spPr/>
+        <p:txBody>
+          <a:bodyPr/>
+          <a:lstStyle/>
+          <a:p>
+            <a:pPr marL="0" indent="0">
+              <a:buNone/>
+            </a:pPr>
+            <a:r>
+              <a:rPr lang="en-GB" dirty="0"/>
+              <a:t>To mint a DOI on creating/updating a record via the API, simply add the field `</a:t>
+            </a:r>
+            <a:r>
+              <a:rPr lang="en-GB" dirty="0" err="1"/>
+              <a:t>publish_on_save</a:t>
+            </a:r>
+            <a:r>
+              <a:rPr lang="en-GB" dirty="0"/>
+              <a:t>: True` to your JSON content to be uploaded. Review the </a:t>
+            </a:r>
+            <a:r>
+              <a:rPr lang="en-GB" dirty="0" err="1"/>
+              <a:t>response.content</a:t>
+            </a:r>
+            <a:r>
+              <a:rPr lang="en-GB" dirty="0"/>
+              <a:t> object to verify if DOI minting was successful – specifically check for any `warnings` in the response JSON.</a:t>
+            </a:r>
+          </a:p>
+          <a:p>
+            <a:pPr marL="0" indent="0">
+              <a:buNone/>
+            </a:pPr>
+            <a:endParaRPr lang="en-GB" dirty="0"/>
+          </a:p>
+          <a:p>
+            <a:pPr marL="0" indent="0">
+              <a:buNone/>
+            </a:pPr>
+            <a:r>
+              <a:rPr lang="en-GB" dirty="0"/>
+              <a:t>If a problem occurs please contact </a:t>
+            </a:r>
+            <a:r>
+              <a:rPr lang="en-GB" dirty="0" err="1"/>
+              <a:t>support@ceda.ac.uk</a:t>
+            </a:r>
+            <a:endParaRPr lang="en-GB" dirty="0"/>
+          </a:p>
+        </p:txBody>
+      </p:sp>
+      <p:pic>
+        <p:nvPicPr>
+          <p:cNvPr id="5" name="Picture 4">
+            <a:extLst>
+              <a:ext uri="{FF2B5EF4-FFF2-40B4-BE49-F238E27FC236}">
+                <a16:creationId xmlns:a16="http://schemas.microsoft.com/office/drawing/2014/main" id="{02692E62-E916-4B6A-B16F-3E5E89E27AFF}"/>
+              </a:ext>
+            </a:extLst>
+          </p:cNvPr>
+          <p:cNvPicPr>
+            <a:picLocks noChangeAspect="1"/>
+          </p:cNvPicPr>
+          <p:nvPr/>
+        </p:nvPicPr>
+        <p:blipFill>
+          <a:blip r:embed="rId2"/>
+          <a:stretch>
+            <a:fillRect/>
+          </a:stretch>
+        </p:blipFill>
+        <p:spPr>
+          <a:xfrm>
+            <a:off x="1240490" y="5011774"/>
+            <a:ext cx="9284552" cy="1567013"/>
+          </a:xfrm>
+          <a:prstGeom prst="rect">
+            <a:avLst/>
+          </a:prstGeom>
+        </p:spPr>
+      </p:pic>
+    </p:spTree>
+    <p:extLst>
+      <p:ext uri="{BB962C8B-B14F-4D97-AF65-F5344CB8AC3E}">
+        <p14:creationId xmlns:p14="http://schemas.microsoft.com/office/powerpoint/2010/main" val="1424265330"/>
       </p:ext>
     </p:extLst>
   </p:cSld>
